--- a/PresentaciónProyecto.pptx
+++ b/PresentaciónProyecto.pptx
@@ -5,7 +5,7 @@
     <p:sldMasterId id="2147483648" r:id="rId1"/>
   </p:sldMasterIdLst>
   <p:notesMasterIdLst>
-    <p:notesMasterId r:id="rId14"/>
+    <p:notesMasterId r:id="rId15"/>
   </p:notesMasterIdLst>
   <p:sldIdLst>
     <p:sldId id="256" r:id="rId2"/>
@@ -17,9 +17,10 @@
     <p:sldId id="262" r:id="rId8"/>
     <p:sldId id="263" r:id="rId9"/>
     <p:sldId id="264" r:id="rId10"/>
-    <p:sldId id="265" r:id="rId11"/>
-    <p:sldId id="266" r:id="rId12"/>
-    <p:sldId id="267" r:id="rId13"/>
+    <p:sldId id="268" r:id="rId11"/>
+    <p:sldId id="265" r:id="rId12"/>
+    <p:sldId id="266" r:id="rId13"/>
+    <p:sldId id="267" r:id="rId14"/>
   </p:sldIdLst>
   <p:sldSz cx="12192000" cy="6858000"/>
   <p:notesSz cx="6858000" cy="9144000"/>
@@ -253,8 +254,11 @@
     </a:lvl9pPr>
   </p:defaultTextStyle>
   <p:extLst>
+    <p:ext uri="{EFAFB233-063F-42B5-8137-9DF3F51BA10A}">
+      <p15:sldGuideLst xmlns:p15="http://schemas.microsoft.com/office/powerpoint/2012/main"/>
+    </p:ext>
     <p:ext uri="GoogleSlidesCustomDataVersion2">
-      <go:slidesCustomData xmlns:go="http://customooxmlschemas.google.com/" xmlns:ahyp="http://schemas.microsoft.com/office/drawing/2018/hyperlinkcolor" xmlns:p15="http://schemas.microsoft.com/office/powerpoint/2012/main" xmlns:p14="http://schemas.microsoft.com/office/powerpoint/2010/main" xmlns:com="http://schemas.openxmlformats.org/drawingml/2006/compatibility" xmlns:pvml="urn:schemas-microsoft-com:office:powerpoint" xmlns:v="urn:schemas-microsoft-com:vml" xmlns:o="urn:schemas-microsoft-com:office:office" xmlns:dgm="http://schemas.openxmlformats.org/drawingml/2006/diagram" xmlns:c="http://schemas.openxmlformats.org/drawingml/2006/chart" xmlns:mv="urn:schemas-microsoft-com:mac:vml" xmlns:mc="http://schemas.openxmlformats.org/markup-compatibility/2006" xmlns="" r:id="rId17" roundtripDataSignature="AMtx7mgB45eFKUlgJVuK0bbd1eEnbw7g3g=="/>
+      <go:slidesCustomData xmlns="" xmlns:mc="http://schemas.openxmlformats.org/markup-compatibility/2006" xmlns:mv="urn:schemas-microsoft-com:mac:vml" xmlns:c="http://schemas.openxmlformats.org/drawingml/2006/chart" xmlns:dgm="http://schemas.openxmlformats.org/drawingml/2006/diagram" xmlns:o="urn:schemas-microsoft-com:office:office" xmlns:v="urn:schemas-microsoft-com:vml" xmlns:pvml="urn:schemas-microsoft-com:office:powerpoint" xmlns:com="http://schemas.openxmlformats.org/drawingml/2006/compatibility" xmlns:p14="http://schemas.microsoft.com/office/powerpoint/2010/main" xmlns:p15="http://schemas.microsoft.com/office/powerpoint/2012/main" xmlns:ahyp="http://schemas.microsoft.com/office/drawing/2018/hyperlinkcolor" xmlns:go="http://customooxmlschemas.google.com/" r:id="rId17" roundtripDataSignature="AMtx7mgB45eFKUlgJVuK0bbd1eEnbw7g3g=="/>
     </p:ext>
   </p:extLst>
 </p:presentation>
@@ -15957,6 +15961,91 @@
   <p:cSld>
     <p:spTree>
       <p:nvGrpSpPr>
+        <p:cNvPr id="1" name=""/>
+        <p:cNvGrpSpPr/>
+        <p:nvPr/>
+      </p:nvGrpSpPr>
+      <p:grpSpPr>
+        <a:xfrm>
+          <a:off x="0" y="0"/>
+          <a:ext cx="0" cy="0"/>
+          <a:chOff x="0" y="0"/>
+          <a:chExt cx="0" cy="0"/>
+        </a:xfrm>
+      </p:grpSpPr>
+      <p:sp>
+        <p:nvSpPr>
+          <p:cNvPr id="2" name="Título 1">
+            <a:extLst>
+              <a:ext uri="{FF2B5EF4-FFF2-40B4-BE49-F238E27FC236}">
+                <a16:creationId xmlns:a16="http://schemas.microsoft.com/office/drawing/2014/main" id="{8F599B20-9989-2CEF-F822-CA901AE4C89A}"/>
+              </a:ext>
+            </a:extLst>
+          </p:cNvPr>
+          <p:cNvSpPr>
+            <a:spLocks noGrp="1"/>
+          </p:cNvSpPr>
+          <p:nvPr>
+            <p:ph type="title"/>
+          </p:nvPr>
+        </p:nvSpPr>
+        <p:spPr/>
+        <p:txBody>
+          <a:bodyPr/>
+          <a:lstStyle/>
+          <a:p>
+            <a:endParaRPr lang="es-CL"/>
+          </a:p>
+        </p:txBody>
+      </p:sp>
+      <p:pic>
+        <p:nvPicPr>
+          <p:cNvPr id="4" name="Imagen 3">
+            <a:extLst>
+              <a:ext uri="{FF2B5EF4-FFF2-40B4-BE49-F238E27FC236}">
+                <a16:creationId xmlns:a16="http://schemas.microsoft.com/office/drawing/2014/main" id="{5EED7BF6-B825-1647-361E-34B2ADBB3031}"/>
+              </a:ext>
+            </a:extLst>
+          </p:cNvPr>
+          <p:cNvPicPr>
+            <a:picLocks noChangeAspect="1"/>
+          </p:cNvPicPr>
+          <p:nvPr/>
+        </p:nvPicPr>
+        <p:blipFill>
+          <a:blip r:embed="rId2"/>
+          <a:stretch>
+            <a:fillRect/>
+          </a:stretch>
+        </p:blipFill>
+        <p:spPr>
+          <a:xfrm>
+            <a:off x="23079" y="346075"/>
+            <a:ext cx="12168921" cy="6146800"/>
+          </a:xfrm>
+          <a:prstGeom prst="rect">
+            <a:avLst/>
+          </a:prstGeom>
+        </p:spPr>
+      </p:pic>
+    </p:spTree>
+    <p:extLst>
+      <p:ext uri="{BB962C8B-B14F-4D97-AF65-F5344CB8AC3E}">
+        <p14:creationId xmlns:p14="http://schemas.microsoft.com/office/powerpoint/2010/main" val="1735863590"/>
+      </p:ext>
+    </p:extLst>
+  </p:cSld>
+  <p:clrMapOvr>
+    <a:masterClrMapping/>
+  </p:clrMapOvr>
+</p:sld>
+</file>
+
+<file path=ppt/slides/slide11.xml><?xml version="1.0" encoding="utf-8"?>
+<p:sld xmlns:a="http://schemas.openxmlformats.org/drawingml/2006/main" xmlns:r="http://schemas.openxmlformats.org/officeDocument/2006/relationships" xmlns:p="http://schemas.openxmlformats.org/presentationml/2006/main">
+  <p:cSld>
+    <p:spTree>
+      <p:nvGrpSpPr>
         <p:cNvPr id="1" name="Shape 139"/>
         <p:cNvGrpSpPr/>
         <p:nvPr/>
@@ -16409,7 +16498,7 @@
 </p:sld>
 </file>
 
-<file path=ppt/slides/slide11.xml><?xml version="1.0" encoding="utf-8"?>
+<file path=ppt/slides/slide12.xml><?xml version="1.0" encoding="utf-8"?>
 <p:sld xmlns:a="http://schemas.openxmlformats.org/drawingml/2006/main" xmlns:r="http://schemas.openxmlformats.org/officeDocument/2006/relationships" xmlns:p="http://schemas.openxmlformats.org/presentationml/2006/main">
   <p:cSld>
     <p:spTree>
@@ -16587,7 +16676,7 @@
 </p:sld>
 </file>
 
-<file path=ppt/slides/slide12.xml><?xml version="1.0" encoding="utf-8"?>
+<file path=ppt/slides/slide13.xml><?xml version="1.0" encoding="utf-8"?>
 <p:sld xmlns:a="http://schemas.openxmlformats.org/drawingml/2006/main" xmlns:r="http://schemas.openxmlformats.org/officeDocument/2006/relationships" xmlns:p="http://schemas.openxmlformats.org/presentationml/2006/main">
   <p:cSld>
     <p:spTree>
@@ -19779,14 +19868,14 @@
               <a:buNone/>
             </a:pPr>
             <a:r>
-              <a:rPr lang="es-CL" sz="1300" b="1">
+              <a:rPr lang="es-CL" sz="1300" b="1" dirty="0">
                 <a:solidFill>
                   <a:schemeClr val="dk1"/>
                 </a:solidFill>
               </a:rPr>
               <a:t>Registro y gestión de usuarios</a:t>
             </a:r>
-            <a:endParaRPr sz="1300" b="1">
+            <a:endParaRPr sz="1300" b="1" dirty="0">
               <a:solidFill>
                 <a:schemeClr val="dk1"/>
               </a:solidFill>
@@ -19810,14 +19899,14 @@
               <a:buChar char="-"/>
             </a:pPr>
             <a:r>
-              <a:rPr lang="es-CL" sz="1300">
+              <a:rPr lang="es-CL" sz="1300" dirty="0">
                 <a:solidFill>
                   <a:schemeClr val="dk1"/>
                 </a:solidFill>
               </a:rPr>
               <a:t>Creación de perfiles de alumnos y administradores de escuela.</a:t>
             </a:r>
-            <a:endParaRPr sz="1300">
+            <a:endParaRPr sz="1300" dirty="0">
               <a:solidFill>
                 <a:schemeClr val="dk1"/>
               </a:solidFill>
@@ -19837,14 +19926,14 @@
               <a:buNone/>
             </a:pPr>
             <a:r>
-              <a:rPr lang="es-CL" sz="1300" b="1">
+              <a:rPr lang="es-CL" sz="1300" b="1" dirty="0">
                 <a:solidFill>
                   <a:schemeClr val="dk1"/>
                 </a:solidFill>
               </a:rPr>
               <a:t>Acceso a material de estudio</a:t>
             </a:r>
-            <a:endParaRPr sz="1300" b="1">
+            <a:endParaRPr sz="1300" b="1" dirty="0">
               <a:solidFill>
                 <a:schemeClr val="dk1"/>
               </a:solidFill>
@@ -19868,14 +19957,14 @@
               <a:buChar char="-"/>
             </a:pPr>
             <a:r>
-              <a:rPr lang="es-CL" sz="1300">
+              <a:rPr lang="es-CL" sz="1300" dirty="0">
                 <a:solidFill>
                   <a:schemeClr val="dk1"/>
                 </a:solidFill>
               </a:rPr>
               <a:t>Consulta de videos tutoriales, guías y recursos digitales.</a:t>
             </a:r>
-            <a:endParaRPr sz="1300">
+            <a:endParaRPr sz="1300" dirty="0">
               <a:solidFill>
                 <a:schemeClr val="dk1"/>
               </a:solidFill>
@@ -19895,14 +19984,14 @@
               <a:buNone/>
             </a:pPr>
             <a:r>
-              <a:rPr lang="es-CL" sz="1300" b="1">
+              <a:rPr lang="es-CL" sz="1300" b="1" dirty="0">
                 <a:solidFill>
                   <a:schemeClr val="dk1"/>
                 </a:solidFill>
               </a:rPr>
               <a:t>Simulación de exámenes teóricos</a:t>
             </a:r>
-            <a:endParaRPr sz="1300" b="1">
+            <a:endParaRPr sz="1300" b="1" dirty="0">
               <a:solidFill>
                 <a:schemeClr val="dk1"/>
               </a:solidFill>
@@ -19926,14 +20015,14 @@
               <a:buChar char="-"/>
             </a:pPr>
             <a:r>
-              <a:rPr lang="es-CL" sz="1300">
+              <a:rPr lang="es-CL" sz="1300" dirty="0">
                 <a:solidFill>
                   <a:schemeClr val="dk1"/>
                 </a:solidFill>
               </a:rPr>
               <a:t>Resolución de cuestionarios con retroalimentación inmediata.</a:t>
             </a:r>
-            <a:endParaRPr sz="1300">
+            <a:endParaRPr sz="1300" dirty="0">
               <a:solidFill>
                 <a:schemeClr val="dk1"/>
               </a:solidFill>
@@ -19953,14 +20042,14 @@
               <a:buNone/>
             </a:pPr>
             <a:r>
-              <a:rPr lang="es-CL" sz="1300" b="1">
+              <a:rPr lang="es-CL" sz="1300" b="1" dirty="0">
                 <a:solidFill>
                   <a:schemeClr val="dk1"/>
                 </a:solidFill>
               </a:rPr>
               <a:t>Agendamiento de clases y pruebas</a:t>
             </a:r>
-            <a:endParaRPr sz="1300" b="1">
+            <a:endParaRPr sz="1300" b="1" dirty="0">
               <a:solidFill>
                 <a:schemeClr val="dk1"/>
               </a:solidFill>
@@ -19984,7 +20073,7 @@
               <a:buChar char="-"/>
             </a:pPr>
             <a:r>
-              <a:rPr lang="es-CL" sz="1300">
+              <a:rPr lang="es-CL" sz="1300" dirty="0">
                 <a:solidFill>
                   <a:schemeClr val="dk1"/>
                 </a:solidFill>
@@ -19992,13 +20081,13 @@
               <a:t>Reserva de horas prácticas y evaluaciones en línea.</a:t>
             </a:r>
             <a:br>
-              <a:rPr lang="es-CL" sz="1300">
+              <a:rPr lang="es-CL" sz="1300" dirty="0">
                 <a:solidFill>
                   <a:schemeClr val="dk1"/>
                 </a:solidFill>
               </a:rPr>
             </a:br>
-            <a:endParaRPr sz="1300">
+            <a:endParaRPr sz="1300" dirty="0">
               <a:solidFill>
                 <a:schemeClr val="dk1"/>
               </a:solidFill>
@@ -20018,14 +20107,14 @@
               <a:buNone/>
             </a:pPr>
             <a:r>
-              <a:rPr lang="es-CL" sz="1300" b="1">
+              <a:rPr lang="es-CL" sz="1300" b="1" dirty="0">
                 <a:solidFill>
                   <a:schemeClr val="dk1"/>
                 </a:solidFill>
               </a:rPr>
               <a:t>Seguimiento del progreso</a:t>
             </a:r>
-            <a:endParaRPr sz="1300" b="1">
+            <a:endParaRPr sz="1300" b="1" dirty="0">
               <a:solidFill>
                 <a:schemeClr val="dk1"/>
               </a:solidFill>
@@ -20044,7 +20133,7 @@
               </a:spcAft>
               <a:buNone/>
             </a:pPr>
-            <a:endParaRPr sz="1300" b="1">
+            <a:endParaRPr sz="1300" b="1" dirty="0">
               <a:solidFill>
                 <a:schemeClr val="dk1"/>
               </a:solidFill>
@@ -20068,7 +20157,7 @@
               <a:buChar char="-"/>
             </a:pPr>
             <a:r>
-              <a:rPr lang="es-CL" sz="1300">
+              <a:rPr lang="es-CL" sz="1300" dirty="0">
                 <a:solidFill>
                   <a:schemeClr val="dk1"/>
                 </a:solidFill>
@@ -20076,13 +20165,13 @@
               <a:t>Reportes individuales y grupales sobre desempeño.</a:t>
             </a:r>
             <a:br>
-              <a:rPr lang="es-CL" sz="1300">
+              <a:rPr lang="es-CL" sz="1300" dirty="0">
                 <a:solidFill>
                   <a:schemeClr val="dk1"/>
                 </a:solidFill>
               </a:rPr>
             </a:br>
-            <a:endParaRPr sz="1300">
+            <a:endParaRPr sz="1300" dirty="0">
               <a:solidFill>
                 <a:schemeClr val="dk1"/>
               </a:solidFill>
@@ -20102,14 +20191,14 @@
               <a:buNone/>
             </a:pPr>
             <a:r>
-              <a:rPr lang="es-CL" sz="1300" b="1">
+              <a:rPr lang="es-CL" sz="1300" b="1" dirty="0">
                 <a:solidFill>
                   <a:schemeClr val="dk1"/>
                 </a:solidFill>
               </a:rPr>
               <a:t>Gestión administrativa de la escuela</a:t>
             </a:r>
-            <a:endParaRPr sz="1300" b="1">
+            <a:endParaRPr sz="1300" b="1" dirty="0">
               <a:solidFill>
                 <a:schemeClr val="dk1"/>
               </a:solidFill>
@@ -20128,7 +20217,7 @@
               </a:spcAft>
               <a:buNone/>
             </a:pPr>
-            <a:endParaRPr sz="1300" b="1">
+            <a:endParaRPr sz="1300" b="1" dirty="0">
               <a:solidFill>
                 <a:schemeClr val="dk1"/>
               </a:solidFill>
@@ -20152,14 +20241,14 @@
               <a:buChar char="-"/>
             </a:pPr>
             <a:r>
-              <a:rPr lang="es-CL" sz="1300">
+              <a:rPr lang="es-CL" sz="1300" dirty="0">
                 <a:solidFill>
                   <a:schemeClr val="dk1"/>
                 </a:solidFill>
               </a:rPr>
               <a:t>Control de horarios, alumnos y resultados en la plataforma.</a:t>
             </a:r>
-            <a:endParaRPr sz="1300">
+            <a:endParaRPr sz="1300" dirty="0">
               <a:solidFill>
                 <a:schemeClr val="dk1"/>
               </a:solidFill>
@@ -20178,7 +20267,7 @@
               </a:spcAft>
               <a:buNone/>
             </a:pPr>
-            <a:endParaRPr sz="1800" b="1">
+            <a:endParaRPr sz="1800" b="1" dirty="0">
               <a:solidFill>
                 <a:schemeClr val="dk1"/>
               </a:solidFill>
@@ -20206,7 +20295,7 @@
               <a:buFont typeface="Arial"/>
               <a:buNone/>
             </a:pPr>
-            <a:endParaRPr sz="1800">
+            <a:endParaRPr sz="1800" dirty="0">
               <a:solidFill>
                 <a:schemeClr val="dk1"/>
               </a:solidFill>
@@ -20234,7 +20323,7 @@
               <a:buFont typeface="Arial"/>
               <a:buNone/>
             </a:pPr>
-            <a:endParaRPr sz="1800" i="0" u="none" strike="noStrike" cap="none">
+            <a:endParaRPr sz="1800" i="0" u="none" strike="noStrike" cap="none" dirty="0">
               <a:solidFill>
                 <a:schemeClr val="dk1"/>
               </a:solidFill>
